--- a/HisabBot — Conversational Bookkeeping.pptx
+++ b/HisabBot — Conversational Bookkeeping.pptx
@@ -5,35 +5,27 @@
     <p:sldMasterId id="2147483648" r:id="rId1"/>
   </p:sldMasterIdLst>
   <p:notesMasterIdLst>
-    <p:notesMasterId r:id="rId13"/>
+    <p:notesMasterId r:id="rId12"/>
   </p:notesMasterIdLst>
   <p:sldIdLst>
     <p:sldId id="256" r:id="rId2"/>
     <p:sldId id="257" r:id="rId3"/>
     <p:sldId id="258" r:id="rId4"/>
     <p:sldId id="259" r:id="rId5"/>
-    <p:sldId id="260" r:id="rId6"/>
-    <p:sldId id="266" r:id="rId7"/>
-    <p:sldId id="261" r:id="rId8"/>
-    <p:sldId id="262" r:id="rId9"/>
-    <p:sldId id="263" r:id="rId10"/>
-    <p:sldId id="264" r:id="rId11"/>
-    <p:sldId id="265" r:id="rId12"/>
+    <p:sldId id="266" r:id="rId6"/>
+    <p:sldId id="261" r:id="rId7"/>
+    <p:sldId id="262" r:id="rId8"/>
+    <p:sldId id="263" r:id="rId9"/>
+    <p:sldId id="264" r:id="rId10"/>
+    <p:sldId id="265" r:id="rId11"/>
   </p:sldIdLst>
   <p:sldSz cx="12192000" cy="6858000"/>
   <p:notesSz cx="6858000" cy="12192000"/>
   <p:embeddedFontLst>
     <p:embeddedFont>
-      <p:font typeface="Poppins" panose="020B0604020202020204" charset="0"/>
-      <p:regular r:id="rId14"/>
-      <p:bold r:id="rId15"/>
-    </p:embeddedFont>
-    <p:embeddedFont>
-      <p:font typeface="Calibri" panose="020F0502020204030204" pitchFamily="34" charset="0"/>
-      <p:regular r:id="rId16"/>
-      <p:bold r:id="rId17"/>
-      <p:italic r:id="rId18"/>
-      <p:boldItalic r:id="rId19"/>
+      <p:font typeface="Poppins" panose="00000500000000000000" pitchFamily="2" charset="0"/>
+      <p:regular r:id="rId13"/>
+      <p:bold r:id="rId14"/>
     </p:embeddedFont>
   </p:embeddedFontLst>
   <p:defaultTextStyle>
@@ -345,90 +337,6 @@
 </p:notes>
 </file>
 
-<file path=ppt/notesSlides/notesSlide10.xml><?xml version="1.0" encoding="utf-8"?>
-<p:notes xmlns:a="http://schemas.openxmlformats.org/drawingml/2006/main" xmlns:r="http://schemas.openxmlformats.org/officeDocument/2006/relationships" xmlns:p="http://schemas.openxmlformats.org/presentationml/2006/main">
-  <p:cSld>
-    <p:spTree>
-      <p:nvGrpSpPr>
-        <p:cNvPr id="1" name=""/>
-        <p:cNvGrpSpPr/>
-        <p:nvPr/>
-      </p:nvGrpSpPr>
-      <p:grpSpPr>
-        <a:xfrm>
-          <a:off x="0" y="0"/>
-          <a:ext cx="0" cy="0"/>
-          <a:chOff x="0" y="0"/>
-          <a:chExt cx="0" cy="0"/>
-        </a:xfrm>
-      </p:grpSpPr>
-      <p:sp>
-        <p:nvSpPr>
-          <p:cNvPr id="2" name="Slide Image Placeholder 1"/>
-          <p:cNvSpPr>
-            <a:spLocks noGrp="1" noRot="1" noChangeAspect="1"/>
-          </p:cNvSpPr>
-          <p:nvPr>
-            <p:ph type="sldImg"/>
-          </p:nvPr>
-        </p:nvSpPr>
-        <p:spPr/>
-      </p:sp>
-      <p:sp>
-        <p:nvSpPr>
-          <p:cNvPr id="3" name="Notes Placeholder 2"/>
-          <p:cNvSpPr>
-            <a:spLocks noGrp="1"/>
-          </p:cNvSpPr>
-          <p:nvPr>
-            <p:ph type="body" idx="1"/>
-          </p:nvPr>
-        </p:nvSpPr>
-        <p:spPr/>
-        <p:txBody>
-          <a:bodyPr/>
-          <a:lstStyle/>
-          <a:p>
-            <a:endParaRPr lang="en-US" dirty="0"/>
-          </a:p>
-        </p:txBody>
-      </p:sp>
-      <p:sp>
-        <p:nvSpPr>
-          <p:cNvPr id="4" name="Slide Number Placeholder 3"/>
-          <p:cNvSpPr>
-            <a:spLocks noGrp="1"/>
-          </p:cNvSpPr>
-          <p:nvPr>
-            <p:ph type="sldNum" sz="quarter" idx="10"/>
-          </p:nvPr>
-        </p:nvSpPr>
-        <p:spPr/>
-        <p:txBody>
-          <a:bodyPr/>
-          <a:lstStyle/>
-          <a:p>
-            <a:fld id="{F7021451-1387-4CA6-816F-3879F97B5CBC}" type="slidenum">
-              <a:rPr lang="en-US"/>
-              <a:t>11</a:t>
-            </a:fld>
-            <a:endParaRPr lang="en-US"/>
-          </a:p>
-        </p:txBody>
-      </p:sp>
-    </p:spTree>
-    <p:extLst>
-      <p:ext uri="{BB962C8B-B14F-4D97-AF65-F5344CB8AC3E}">
-        <p14:creationId xmlns:p14="http://schemas.microsoft.com/office/powerpoint/2010/main" val="1024086991"/>
-      </p:ext>
-    </p:extLst>
-  </p:cSld>
-  <p:clrMapOvr>
-    <a:masterClrMapping/>
-  </p:clrMapOvr>
-</p:notes>
-</file>
-
 <file path=ppt/notesSlides/notesSlide2.xml><?xml version="1.0" encoding="utf-8"?>
 <p:notes xmlns:a="http://schemas.openxmlformats.org/drawingml/2006/main" xmlns:r="http://schemas.openxmlformats.org/officeDocument/2006/relationships" xmlns:p="http://schemas.openxmlformats.org/presentationml/2006/main">
   <p:cSld>
@@ -746,7 +654,7 @@
           <a:p>
             <a:fld id="{F7021451-1387-4CA6-816F-3879F97B5CBC}" type="slidenum">
               <a:rPr lang="en-US"/>
-              <a:t>5</a:t>
+              <a:t>6</a:t>
             </a:fld>
             <a:endParaRPr lang="en-US"/>
           </a:p>
@@ -1915,593 +1823,10 @@
   <p:clrMapOvr>
     <a:masterClrMapping/>
   </p:clrMapOvr>
-  <p:timing>
-    <p:tnLst>
-      <p:par>
-        <p:cTn id="1" dur="indefinite" restart="never" nodeType="tmRoot"/>
-      </p:par>
-    </p:tnLst>
-  </p:timing>
 </p:sld>
 </file>
 
 <file path=ppt/slides/slide10.xml><?xml version="1.0" encoding="utf-8"?>
-<p:sld xmlns:a="http://schemas.openxmlformats.org/drawingml/2006/main" xmlns:r="http://schemas.openxmlformats.org/officeDocument/2006/relationships" xmlns:p="http://schemas.openxmlformats.org/presentationml/2006/main">
-  <p:cSld name="Slide 9">
-    <p:bg>
-      <p:bgPr>
-        <a:solidFill>
-          <a:srgbClr val="F6F4EE"/>
-        </a:solidFill>
-        <a:effectLst/>
-      </p:bgPr>
-    </p:bg>
-    <p:spTree>
-      <p:nvGrpSpPr>
-        <p:cNvPr id="1" name=""/>
-        <p:cNvGrpSpPr/>
-        <p:nvPr/>
-      </p:nvGrpSpPr>
-      <p:grpSpPr>
-        <a:xfrm>
-          <a:off x="0" y="0"/>
-          <a:ext cx="0" cy="0"/>
-          <a:chOff x="0" y="0"/>
-          <a:chExt cx="0" cy="0"/>
-        </a:xfrm>
-      </p:grpSpPr>
-      <p:sp>
-        <p:nvSpPr>
-          <p:cNvPr id="2" name="Text 0"/>
-          <p:cNvSpPr>
-            <a:spLocks noGrp="1"/>
-          </p:cNvSpPr>
-          <p:nvPr>
-            <p:ph type="title"/>
-          </p:nvPr>
-        </p:nvSpPr>
-        <p:spPr>
-          <a:xfrm>
-            <a:off x="812800" y="812800"/>
-            <a:ext cx="10883392" cy="500327"/>
-          </a:xfrm>
-          <a:prstGeom prst="rect">
-            <a:avLst/>
-          </a:prstGeom>
-          <a:noFill/>
-          <a:ln/>
-        </p:spPr>
-        <p:txBody>
-          <a:bodyPr wrap="square" lIns="0" tIns="0" rIns="0" bIns="0" rtlCol="0" anchor="t">
-            <a:normAutofit/>
-          </a:bodyPr>
-          <a:lstStyle/>
-          <a:p>
-            <a:pPr marL="0" indent="0" algn="l">
-              <a:lnSpc>
-                <a:spcPts val="3740"/>
-              </a:lnSpc>
-              <a:buNone/>
-            </a:pPr>
-            <a:r>
-              <a:rPr lang="en-US" sz="3400" b="1" i="0" dirty="0">
-                <a:solidFill>
-                  <a:srgbClr val="12202F"/>
-                </a:solidFill>
-                <a:latin typeface="Poppins" pitchFamily="34" charset="0"/>
-                <a:ea typeface="Poppins" pitchFamily="34" charset="-122"/>
-                <a:cs typeface="Poppins" pitchFamily="34" charset="-120"/>
-              </a:rPr>
-              <a:t>Limitations &amp; Next Steps</a:t>
-            </a:r>
-            <a:endParaRPr lang="en-US" sz="3400" dirty="0"/>
-          </a:p>
-        </p:txBody>
-      </p:sp>
-      <p:sp>
-        <p:nvSpPr>
-          <p:cNvPr id="3" name="Shape 1"/>
-          <p:cNvSpPr/>
-          <p:nvPr/>
-        </p:nvSpPr>
-        <p:spPr>
-          <a:xfrm>
-            <a:off x="812800" y="1567129"/>
-            <a:ext cx="5194300" cy="1986029"/>
-          </a:xfrm>
-          <a:prstGeom prst="roundRect">
-            <a:avLst>
-              <a:gd name="adj" fmla="val 6395"/>
-            </a:avLst>
-          </a:prstGeom>
-          <a:solidFill>
-            <a:srgbClr val="FFFFFF"/>
-          </a:solidFill>
-          <a:ln/>
-        </p:spPr>
-      </p:sp>
-      <p:sp>
-        <p:nvSpPr>
-          <p:cNvPr id="4" name="Shape 2"/>
-          <p:cNvSpPr/>
-          <p:nvPr/>
-        </p:nvSpPr>
-        <p:spPr>
-          <a:xfrm>
-            <a:off x="812800" y="1567129"/>
-            <a:ext cx="5194300" cy="1986029"/>
-          </a:xfrm>
-          <a:custGeom>
-            <a:avLst/>
-            <a:gdLst/>
-            <a:ahLst/>
-            <a:cxnLst/>
-            <a:rect l="l" t="t" r="r" b="b"/>
-            <a:pathLst>
-              <a:path w="5194300" h="1986029">
-                <a:moveTo>
-                  <a:pt x="0" y="127000"/>
-                </a:moveTo>
-                <a:lnTo>
-                  <a:pt x="0" y="127000"/>
-                </a:lnTo>
-                <a:arcTo wR="127000" hR="127000" stAng="10800000" swAng="5400000"/>
-                <a:lnTo>
-                  <a:pt x="5067300" y="0"/>
-                </a:lnTo>
-                <a:arcTo wR="127000" hR="127000" stAng="16200000" swAng="5400000"/>
-                <a:lnTo>
-                  <a:pt x="5194300" y="127000"/>
-                </a:lnTo>
-                <a:arcTo wR="127000" hR="76200" stAng="0" swAng="-5400000"/>
-                <a:lnTo>
-                  <a:pt x="127000" y="50800"/>
-                </a:lnTo>
-                <a:arcTo wR="127000" hR="76200" stAng="16200000" swAng="-5400000"/>
-                <a:close/>
-              </a:path>
-            </a:pathLst>
-          </a:custGeom>
-          <a:solidFill>
-            <a:srgbClr val="F2B544"/>
-          </a:solidFill>
-          <a:ln/>
-        </p:spPr>
-      </p:sp>
-      <p:sp>
-        <p:nvSpPr>
-          <p:cNvPr id="5" name="Text 3"/>
-          <p:cNvSpPr/>
-          <p:nvPr/>
-        </p:nvSpPr>
-        <p:spPr>
-          <a:xfrm>
-            <a:off x="1066800" y="1871929"/>
-            <a:ext cx="4826889" cy="314920"/>
-          </a:xfrm>
-          <a:prstGeom prst="rect">
-            <a:avLst/>
-          </a:prstGeom>
-          <a:noFill/>
-          <a:ln/>
-        </p:spPr>
-        <p:txBody>
-          <a:bodyPr wrap="square" lIns="0" tIns="0" rIns="0" bIns="0" rtlCol="0" anchor="t">
-            <a:normAutofit/>
-          </a:bodyPr>
-          <a:lstStyle/>
-          <a:p>
-            <a:pPr marL="0" indent="0" algn="l">
-              <a:lnSpc>
-                <a:spcPts val="2280"/>
-              </a:lnSpc>
-              <a:buNone/>
-            </a:pPr>
-            <a:r>
-              <a:rPr lang="en-US" sz="1900" b="1" dirty="0">
-                <a:solidFill>
-                  <a:srgbClr val="12202F"/>
-                </a:solidFill>
-                <a:latin typeface="Poppins" pitchFamily="34" charset="0"/>
-                <a:ea typeface="Poppins" pitchFamily="34" charset="-122"/>
-                <a:cs typeface="Poppins" pitchFamily="34" charset="-120"/>
-              </a:rPr>
-              <a:t>Today</a:t>
-            </a:r>
-            <a:endParaRPr lang="en-US" sz="1900" dirty="0"/>
-          </a:p>
-        </p:txBody>
-      </p:sp>
-      <p:sp>
-        <p:nvSpPr>
-          <p:cNvPr id="6" name="Text 4"/>
-          <p:cNvSpPr/>
-          <p:nvPr/>
-        </p:nvSpPr>
-        <p:spPr>
-          <a:xfrm>
-            <a:off x="1099058" y="2161449"/>
-            <a:ext cx="4787773" cy="1163108"/>
-          </a:xfrm>
-          <a:prstGeom prst="rect">
-            <a:avLst/>
-          </a:prstGeom>
-          <a:noFill/>
-          <a:ln/>
-        </p:spPr>
-        <p:txBody>
-          <a:bodyPr wrap="square" lIns="0" tIns="0" rIns="0" bIns="0" rtlCol="0" anchor="t">
-            <a:normAutofit/>
-          </a:bodyPr>
-          <a:lstStyle/>
-          <a:p>
-            <a:pPr marL="196342" indent="-196342" algn="l">
-              <a:lnSpc>
-                <a:spcPts val="2240"/>
-              </a:lnSpc>
-              <a:buSzPct val="100000"/>
-              <a:buChar char="•"/>
-            </a:pPr>
-            <a:r>
-              <a:rPr lang="en-US" sz="1600" dirty="0">
-                <a:solidFill>
-                  <a:srgbClr val="3A4856"/>
-                </a:solidFill>
-                <a:latin typeface="Poppins" pitchFamily="34" charset="0"/>
-                <a:ea typeface="Poppins" pitchFamily="34" charset="-122"/>
-                <a:cs typeface="Poppins" pitchFamily="34" charset="-120"/>
-              </a:rPr>
-              <a:t>Chat needs local Qwen running</a:t>
-            </a:r>
-            <a:endParaRPr lang="en-US" sz="1600" dirty="0"/>
-          </a:p>
-          <a:p>
-            <a:pPr marL="196342" indent="-196342" algn="l">
-              <a:lnSpc>
-                <a:spcPts val="2240"/>
-              </a:lnSpc>
-              <a:buSzPct val="100000"/>
-              <a:buChar char="•"/>
-            </a:pPr>
-            <a:r>
-              <a:rPr lang="en-US" sz="1600" dirty="0">
-                <a:solidFill>
-                  <a:srgbClr val="3A4856"/>
-                </a:solidFill>
-                <a:latin typeface="Poppins" pitchFamily="34" charset="0"/>
-                <a:ea typeface="Poppins" pitchFamily="34" charset="-122"/>
-                <a:cs typeface="Poppins" pitchFamily="34" charset="-120"/>
-              </a:rPr>
-              <a:t>Voice needs Whisper and FFmpeg</a:t>
-            </a:r>
-            <a:endParaRPr lang="en-US" sz="1600" dirty="0"/>
-          </a:p>
-          <a:p>
-            <a:pPr marL="196342" indent="-196342" algn="l">
-              <a:lnSpc>
-                <a:spcPts val="2240"/>
-              </a:lnSpc>
-              <a:buSzPct val="100000"/>
-              <a:buChar char="•"/>
-            </a:pPr>
-            <a:r>
-              <a:rPr lang="en-US" sz="1600" dirty="0">
-                <a:solidFill>
-                  <a:srgbClr val="3A4856"/>
-                </a:solidFill>
-                <a:latin typeface="Poppins" pitchFamily="34" charset="0"/>
-                <a:ea typeface="Poppins" pitchFamily="34" charset="-122"/>
-                <a:cs typeface="Poppins" pitchFamily="34" charset="-120"/>
-              </a:rPr>
-              <a:t>No authentication yet</a:t>
-            </a:r>
-            <a:endParaRPr lang="en-US" sz="1600" dirty="0"/>
-          </a:p>
-          <a:p>
-            <a:pPr marL="196342" indent="-196342" algn="l">
-              <a:lnSpc>
-                <a:spcPts val="2240"/>
-              </a:lnSpc>
-              <a:buSzPct val="100000"/>
-              <a:buChar char="•"/>
-            </a:pPr>
-            <a:r>
-              <a:rPr lang="en-US" sz="1600" dirty="0">
-                <a:solidFill>
-                  <a:srgbClr val="3A4856"/>
-                </a:solidFill>
-                <a:latin typeface="Poppins" pitchFamily="34" charset="0"/>
-                <a:ea typeface="Poppins" pitchFamily="34" charset="-122"/>
-                <a:cs typeface="Poppins" pitchFamily="34" charset="-120"/>
-              </a:rPr>
-              <a:t>Chat history in browser storage</a:t>
-            </a:r>
-            <a:endParaRPr lang="en-US" sz="1600" dirty="0"/>
-          </a:p>
-        </p:txBody>
-      </p:sp>
-      <p:sp>
-        <p:nvSpPr>
-          <p:cNvPr id="7" name="Shape 5"/>
-          <p:cNvSpPr/>
-          <p:nvPr/>
-        </p:nvSpPr>
-        <p:spPr>
-          <a:xfrm>
-            <a:off x="6184900" y="1567129"/>
-            <a:ext cx="5194300" cy="1986029"/>
-          </a:xfrm>
-          <a:prstGeom prst="roundRect">
-            <a:avLst>
-              <a:gd name="adj" fmla="val 6395"/>
-            </a:avLst>
-          </a:prstGeom>
-          <a:solidFill>
-            <a:srgbClr val="FFFFFF"/>
-          </a:solidFill>
-          <a:ln/>
-        </p:spPr>
-      </p:sp>
-      <p:sp>
-        <p:nvSpPr>
-          <p:cNvPr id="8" name="Shape 6"/>
-          <p:cNvSpPr/>
-          <p:nvPr/>
-        </p:nvSpPr>
-        <p:spPr>
-          <a:xfrm>
-            <a:off x="6184900" y="1567129"/>
-            <a:ext cx="5194300" cy="1986029"/>
-          </a:xfrm>
-          <a:custGeom>
-            <a:avLst/>
-            <a:gdLst/>
-            <a:ahLst/>
-            <a:cxnLst/>
-            <a:rect l="l" t="t" r="r" b="b"/>
-            <a:pathLst>
-              <a:path w="5194300" h="1986029">
-                <a:moveTo>
-                  <a:pt x="0" y="127000"/>
-                </a:moveTo>
-                <a:lnTo>
-                  <a:pt x="0" y="127000"/>
-                </a:lnTo>
-                <a:arcTo wR="127000" hR="127000" stAng="10800000" swAng="5400000"/>
-                <a:lnTo>
-                  <a:pt x="5067300" y="0"/>
-                </a:lnTo>
-                <a:arcTo wR="127000" hR="127000" stAng="16200000" swAng="5400000"/>
-                <a:lnTo>
-                  <a:pt x="5194300" y="127000"/>
-                </a:lnTo>
-                <a:arcTo wR="127000" hR="76200" stAng="0" swAng="-5400000"/>
-                <a:lnTo>
-                  <a:pt x="127000" y="50800"/>
-                </a:lnTo>
-                <a:arcTo wR="127000" hR="76200" stAng="16200000" swAng="-5400000"/>
-                <a:close/>
-              </a:path>
-            </a:pathLst>
-          </a:custGeom>
-          <a:solidFill>
-            <a:srgbClr val="14B8A6"/>
-          </a:solidFill>
-          <a:ln/>
-        </p:spPr>
-      </p:sp>
-      <p:sp>
-        <p:nvSpPr>
-          <p:cNvPr id="9" name="Text 7"/>
-          <p:cNvSpPr/>
-          <p:nvPr/>
-        </p:nvSpPr>
-        <p:spPr>
-          <a:xfrm>
-            <a:off x="6438900" y="1871929"/>
-            <a:ext cx="4826889" cy="314920"/>
-          </a:xfrm>
-          <a:prstGeom prst="rect">
-            <a:avLst/>
-          </a:prstGeom>
-          <a:noFill/>
-          <a:ln/>
-        </p:spPr>
-        <p:txBody>
-          <a:bodyPr wrap="square" lIns="0" tIns="0" rIns="0" bIns="0" rtlCol="0" anchor="t">
-            <a:normAutofit/>
-          </a:bodyPr>
-          <a:lstStyle/>
-          <a:p>
-            <a:pPr marL="0" indent="0" algn="l">
-              <a:lnSpc>
-                <a:spcPts val="2280"/>
-              </a:lnSpc>
-              <a:buNone/>
-            </a:pPr>
-            <a:r>
-              <a:rPr lang="en-US" sz="1900" b="1" dirty="0">
-                <a:solidFill>
-                  <a:srgbClr val="12202F"/>
-                </a:solidFill>
-                <a:latin typeface="Poppins" pitchFamily="34" charset="0"/>
-                <a:ea typeface="Poppins" pitchFamily="34" charset="-122"/>
-                <a:cs typeface="Poppins" pitchFamily="34" charset="-120"/>
-              </a:rPr>
-              <a:t>Next</a:t>
-            </a:r>
-            <a:endParaRPr lang="en-US" sz="1900" dirty="0"/>
-          </a:p>
-        </p:txBody>
-      </p:sp>
-      <p:sp>
-        <p:nvSpPr>
-          <p:cNvPr id="10" name="Text 8"/>
-          <p:cNvSpPr/>
-          <p:nvPr/>
-        </p:nvSpPr>
-        <p:spPr>
-          <a:xfrm>
-            <a:off x="6471158" y="2161449"/>
-            <a:ext cx="4787773" cy="1163108"/>
-          </a:xfrm>
-          <a:prstGeom prst="rect">
-            <a:avLst/>
-          </a:prstGeom>
-          <a:noFill/>
-          <a:ln/>
-        </p:spPr>
-        <p:txBody>
-          <a:bodyPr wrap="square" lIns="0" tIns="0" rIns="0" bIns="0" rtlCol="0" anchor="t">
-            <a:normAutofit/>
-          </a:bodyPr>
-          <a:lstStyle/>
-          <a:p>
-            <a:pPr marL="196342" indent="-196342" algn="l">
-              <a:lnSpc>
-                <a:spcPts val="2240"/>
-              </a:lnSpc>
-              <a:buSzPct val="100000"/>
-              <a:buChar char="•"/>
-            </a:pPr>
-            <a:r>
-              <a:rPr lang="en-US" sz="1600" dirty="0">
-                <a:solidFill>
-                  <a:srgbClr val="3A4856"/>
-                </a:solidFill>
-                <a:latin typeface="Poppins" pitchFamily="34" charset="0"/>
-                <a:ea typeface="Poppins" pitchFamily="34" charset="-122"/>
-                <a:cs typeface="Poppins" pitchFamily="34" charset="-120"/>
-              </a:rPr>
-              <a:t>Authentication and per-user access</a:t>
-            </a:r>
-            <a:endParaRPr lang="en-US" sz="1600" dirty="0"/>
-          </a:p>
-          <a:p>
-            <a:pPr marL="196342" indent="-196342" algn="l">
-              <a:lnSpc>
-                <a:spcPts val="2240"/>
-              </a:lnSpc>
-              <a:buSzPct val="100000"/>
-              <a:buChar char="•"/>
-            </a:pPr>
-            <a:r>
-              <a:rPr lang="en-US" sz="1600" dirty="0">
-                <a:solidFill>
-                  <a:srgbClr val="3A4856"/>
-                </a:solidFill>
-                <a:latin typeface="Poppins" pitchFamily="34" charset="0"/>
-                <a:ea typeface="Poppins" pitchFamily="34" charset="-122"/>
-                <a:cs typeface="Poppins" pitchFamily="34" charset="-120"/>
-              </a:rPr>
-              <a:t>Automated API and security tests</a:t>
-            </a:r>
-            <a:endParaRPr lang="en-US" sz="1600" dirty="0"/>
-          </a:p>
-          <a:p>
-            <a:pPr marL="196342" indent="-196342" algn="l">
-              <a:lnSpc>
-                <a:spcPts val="2240"/>
-              </a:lnSpc>
-              <a:buSzPct val="100000"/>
-              <a:buChar char="•"/>
-            </a:pPr>
-            <a:r>
-              <a:rPr lang="en-US" sz="1600" dirty="0">
-                <a:solidFill>
-                  <a:srgbClr val="3A4856"/>
-                </a:solidFill>
-                <a:latin typeface="Poppins" pitchFamily="34" charset="0"/>
-                <a:ea typeface="Poppins" pitchFamily="34" charset="-122"/>
-                <a:cs typeface="Poppins" pitchFamily="34" charset="-120"/>
-              </a:rPr>
-              <a:t>Budget recommendations</a:t>
-            </a:r>
-            <a:endParaRPr lang="en-US" sz="1600" dirty="0"/>
-          </a:p>
-          <a:p>
-            <a:pPr marL="196342" indent="-196342" algn="l">
-              <a:lnSpc>
-                <a:spcPts val="2240"/>
-              </a:lnSpc>
-              <a:buSzPct val="100000"/>
-              <a:buChar char="•"/>
-            </a:pPr>
-            <a:r>
-              <a:rPr lang="en-US" sz="1600" dirty="0">
-                <a:solidFill>
-                  <a:srgbClr val="3A4856"/>
-                </a:solidFill>
-                <a:latin typeface="Poppins" pitchFamily="34" charset="0"/>
-                <a:ea typeface="Poppins" pitchFamily="34" charset="-122"/>
-                <a:cs typeface="Poppins" pitchFamily="34" charset="-120"/>
-              </a:rPr>
-              <a:t>Mobile app and optional cloud sync</a:t>
-            </a:r>
-            <a:endParaRPr lang="en-US" sz="1600" dirty="0"/>
-          </a:p>
-        </p:txBody>
-      </p:sp>
-      <p:sp>
-        <p:nvSpPr>
-          <p:cNvPr id="11" name="Text 9"/>
-          <p:cNvSpPr/>
-          <p:nvPr/>
-        </p:nvSpPr>
-        <p:spPr>
-          <a:xfrm>
-            <a:off x="812800" y="6238280"/>
-            <a:ext cx="1176496" cy="238720"/>
-          </a:xfrm>
-          <a:prstGeom prst="rect">
-            <a:avLst/>
-          </a:prstGeom>
-          <a:noFill/>
-          <a:ln/>
-        </p:spPr>
-        <p:txBody>
-          <a:bodyPr wrap="square" lIns="0" tIns="0" rIns="0" bIns="0" rtlCol="0" anchor="t">
-            <a:normAutofit/>
-          </a:bodyPr>
-          <a:lstStyle/>
-          <a:p>
-            <a:pPr marL="0" indent="0" algn="l">
-              <a:lnSpc>
-                <a:spcPts val="1680"/>
-              </a:lnSpc>
-              <a:buNone/>
-            </a:pPr>
-            <a:r>
-              <a:rPr lang="en-US" sz="1200" dirty="0">
-                <a:solidFill>
-                  <a:srgbClr val="5B6773"/>
-                </a:solidFill>
-                <a:latin typeface="Poppins" pitchFamily="34" charset="0"/>
-                <a:ea typeface="Poppins" pitchFamily="34" charset="-122"/>
-                <a:cs typeface="Poppins" pitchFamily="34" charset="-120"/>
-              </a:rPr>
-              <a:t>HisabBot · 09</a:t>
-            </a:r>
-            <a:endParaRPr lang="en-US" sz="1200" dirty="0"/>
-          </a:p>
-        </p:txBody>
-      </p:sp>
-    </p:spTree>
-  </p:cSld>
-  <p:clrMapOvr>
-    <a:masterClrMapping/>
-  </p:clrMapOvr>
-  <p:timing>
-    <p:tnLst>
-      <p:par>
-        <p:cTn id="1" dur="indefinite" restart="never" nodeType="tmRoot"/>
-      </p:par>
-    </p:tnLst>
-  </p:timing>
-</p:sld>
-</file>
-
-<file path=ppt/slides/slide11.xml><?xml version="1.0" encoding="utf-8"?>
 <p:sld xmlns:a="http://schemas.openxmlformats.org/drawingml/2006/main" xmlns:r="http://schemas.openxmlformats.org/officeDocument/2006/relationships" xmlns:p="http://schemas.openxmlformats.org/presentationml/2006/main">
   <p:cSld name="Slide 10">
     <p:bg>
@@ -2539,7 +1864,7 @@
         <p:spPr>
           <a:xfrm>
             <a:off x="812800" y="1538089"/>
-            <a:ext cx="10883392" cy="1366441"/>
+            <a:ext cx="9021313" cy="1366441"/>
           </a:xfrm>
           <a:prstGeom prst="rect">
             <a:avLst/>
@@ -2553,7 +1878,7 @@
           </a:bodyPr>
           <a:lstStyle/>
           <a:p>
-            <a:pPr marL="0" indent="0" algn="l">
+            <a:pPr marL="0" indent="0">
               <a:lnSpc>
                 <a:spcPts val="5280"/>
               </a:lnSpc>
@@ -3141,13 +2466,6 @@
   <p:clrMapOvr>
     <a:masterClrMapping/>
   </p:clrMapOvr>
-  <p:timing>
-    <p:tnLst>
-      <p:par>
-        <p:cTn id="1" dur="indefinite" restart="never" nodeType="tmRoot"/>
-      </p:par>
-    </p:tnLst>
-  </p:timing>
 </p:sld>
 </file>
 
@@ -3905,13 +3223,6 @@
   <p:clrMapOvr>
     <a:masterClrMapping/>
   </p:clrMapOvr>
-  <p:timing>
-    <p:tnLst>
-      <p:par>
-        <p:cTn id="1" dur="indefinite" restart="never" nodeType="tmRoot"/>
-      </p:par>
-    </p:tnLst>
-  </p:timing>
 </p:sld>
 </file>
 
@@ -4985,13 +4296,6 @@
   <p:clrMapOvr>
     <a:masterClrMapping/>
   </p:clrMapOvr>
-  <p:timing>
-    <p:tnLst>
-      <p:par>
-        <p:cTn id="1" dur="indefinite" restart="never" nodeType="tmRoot"/>
-      </p:par>
-    </p:tnLst>
-  </p:timing>
 </p:sld>
 </file>
 
@@ -5801,825 +5105,10 @@
   <p:clrMapOvr>
     <a:masterClrMapping/>
   </p:clrMapOvr>
-  <p:timing>
-    <p:tnLst>
-      <p:par>
-        <p:cTn id="1" dur="indefinite" restart="never" nodeType="tmRoot"/>
-      </p:par>
-    </p:tnLst>
-  </p:timing>
 </p:sld>
 </file>
 
 <file path=ppt/slides/slide5.xml><?xml version="1.0" encoding="utf-8"?>
-<p:sld xmlns:a="http://schemas.openxmlformats.org/drawingml/2006/main" xmlns:r="http://schemas.openxmlformats.org/officeDocument/2006/relationships" xmlns:p="http://schemas.openxmlformats.org/presentationml/2006/main">
-  <p:cSld name="Slide 5">
-    <p:bg>
-      <p:bgPr>
-        <a:solidFill>
-          <a:srgbClr val="F6F4EE"/>
-        </a:solidFill>
-        <a:effectLst/>
-      </p:bgPr>
-    </p:bg>
-    <p:spTree>
-      <p:nvGrpSpPr>
-        <p:cNvPr id="1" name=""/>
-        <p:cNvGrpSpPr/>
-        <p:nvPr/>
-      </p:nvGrpSpPr>
-      <p:grpSpPr>
-        <a:xfrm>
-          <a:off x="0" y="0"/>
-          <a:ext cx="0" cy="0"/>
-          <a:chOff x="0" y="0"/>
-          <a:chExt cx="0" cy="0"/>
-        </a:xfrm>
-      </p:grpSpPr>
-      <p:sp>
-        <p:nvSpPr>
-          <p:cNvPr id="2" name="Text 0"/>
-          <p:cNvSpPr>
-            <a:spLocks noGrp="1"/>
-          </p:cNvSpPr>
-          <p:nvPr>
-            <p:ph type="title"/>
-          </p:nvPr>
-        </p:nvSpPr>
-        <p:spPr>
-          <a:xfrm>
-            <a:off x="812800" y="812800"/>
-            <a:ext cx="10883392" cy="500327"/>
-          </a:xfrm>
-          <a:prstGeom prst="rect">
-            <a:avLst/>
-          </a:prstGeom>
-          <a:noFill/>
-          <a:ln/>
-        </p:spPr>
-        <p:txBody>
-          <a:bodyPr wrap="square" lIns="0" tIns="0" rIns="0" bIns="0" rtlCol="0" anchor="t">
-            <a:normAutofit/>
-          </a:bodyPr>
-          <a:lstStyle/>
-          <a:p>
-            <a:pPr marL="0" indent="0" algn="l">
-              <a:lnSpc>
-                <a:spcPts val="3740"/>
-              </a:lnSpc>
-              <a:buNone/>
-            </a:pPr>
-            <a:r>
-              <a:rPr lang="en-US" sz="3400" b="1" i="0" dirty="0">
-                <a:solidFill>
-                  <a:srgbClr val="12202F"/>
-                </a:solidFill>
-                <a:latin typeface="Poppins" pitchFamily="34" charset="0"/>
-                <a:ea typeface="Poppins" pitchFamily="34" charset="-122"/>
-                <a:cs typeface="Poppins" pitchFamily="34" charset="-120"/>
-              </a:rPr>
-              <a:t>System Architecture</a:t>
-            </a:r>
-            <a:endParaRPr lang="en-US" sz="3400" dirty="0"/>
-          </a:p>
-        </p:txBody>
-      </p:sp>
-      <p:sp>
-        <p:nvSpPr>
-          <p:cNvPr id="3" name="Shape 1"/>
-          <p:cNvSpPr/>
-          <p:nvPr/>
-        </p:nvSpPr>
-        <p:spPr>
-          <a:xfrm>
-            <a:off x="812800" y="1567129"/>
-            <a:ext cx="2508250" cy="1578438"/>
-          </a:xfrm>
-          <a:prstGeom prst="roundRect">
-            <a:avLst>
-              <a:gd name="adj" fmla="val 8046"/>
-            </a:avLst>
-          </a:prstGeom>
-          <a:solidFill>
-            <a:srgbClr val="FFFFFF"/>
-          </a:solidFill>
-          <a:ln/>
-        </p:spPr>
-      </p:sp>
-      <p:sp>
-        <p:nvSpPr>
-          <p:cNvPr id="4" name="Shape 2"/>
-          <p:cNvSpPr/>
-          <p:nvPr/>
-        </p:nvSpPr>
-        <p:spPr>
-          <a:xfrm>
-            <a:off x="812800" y="1567129"/>
-            <a:ext cx="2508250" cy="1578438"/>
-          </a:xfrm>
-          <a:custGeom>
-            <a:avLst/>
-            <a:gdLst/>
-            <a:ahLst/>
-            <a:cxnLst/>
-            <a:rect l="l" t="t" r="r" b="b"/>
-            <a:pathLst>
-              <a:path w="2508250" h="1578438">
-                <a:moveTo>
-                  <a:pt x="0" y="127000"/>
-                </a:moveTo>
-                <a:lnTo>
-                  <a:pt x="0" y="127000"/>
-                </a:lnTo>
-                <a:arcTo wR="127000" hR="127000" stAng="10800000" swAng="5400000"/>
-                <a:lnTo>
-                  <a:pt x="2381250" y="0"/>
-                </a:lnTo>
-                <a:arcTo wR="127000" hR="127000" stAng="16200000" swAng="5400000"/>
-                <a:lnTo>
-                  <a:pt x="2508250" y="127000"/>
-                </a:lnTo>
-                <a:arcTo wR="127000" hR="76200" stAng="0" swAng="-5400000"/>
-                <a:lnTo>
-                  <a:pt x="127000" y="50800"/>
-                </a:lnTo>
-                <a:arcTo wR="127000" hR="76200" stAng="16200000" swAng="-5400000"/>
-                <a:close/>
-              </a:path>
-            </a:pathLst>
-          </a:custGeom>
-          <a:solidFill>
-            <a:srgbClr val="14B8A6"/>
-          </a:solidFill>
-          <a:ln/>
-        </p:spPr>
-      </p:sp>
-      <p:sp>
-        <p:nvSpPr>
-          <p:cNvPr id="5" name="Text 3"/>
-          <p:cNvSpPr/>
-          <p:nvPr/>
-        </p:nvSpPr>
-        <p:spPr>
-          <a:xfrm>
-            <a:off x="1041400" y="1846529"/>
-            <a:ext cx="2112582" cy="299707"/>
-          </a:xfrm>
-          <a:prstGeom prst="rect">
-            <a:avLst/>
-          </a:prstGeom>
-          <a:noFill/>
-          <a:ln/>
-        </p:spPr>
-        <p:txBody>
-          <a:bodyPr wrap="square" lIns="0" tIns="0" rIns="0" bIns="0" rtlCol="0" anchor="t">
-            <a:normAutofit/>
-          </a:bodyPr>
-          <a:lstStyle/>
-          <a:p>
-            <a:pPr marL="0" indent="0" algn="l">
-              <a:lnSpc>
-                <a:spcPts val="2160"/>
-              </a:lnSpc>
-              <a:buNone/>
-            </a:pPr>
-            <a:r>
-              <a:rPr lang="en-US" sz="1800" b="1" dirty="0">
-                <a:solidFill>
-                  <a:srgbClr val="12202F"/>
-                </a:solidFill>
-                <a:latin typeface="Poppins" pitchFamily="34" charset="0"/>
-                <a:ea typeface="Poppins" pitchFamily="34" charset="-122"/>
-                <a:cs typeface="Poppins" pitchFamily="34" charset="-120"/>
-              </a:rPr>
-              <a:t>Frontend</a:t>
-            </a:r>
-            <a:endParaRPr lang="en-US" sz="1800" dirty="0"/>
-          </a:p>
-        </p:txBody>
-      </p:sp>
-      <p:sp>
-        <p:nvSpPr>
-          <p:cNvPr id="6" name="Text 4"/>
-          <p:cNvSpPr/>
-          <p:nvPr/>
-        </p:nvSpPr>
-        <p:spPr>
-          <a:xfrm>
-            <a:off x="1041400" y="2197035"/>
-            <a:ext cx="2112582" cy="745331"/>
-          </a:xfrm>
-          <a:prstGeom prst="rect">
-            <a:avLst/>
-          </a:prstGeom>
-          <a:noFill/>
-          <a:ln/>
-        </p:spPr>
-        <p:txBody>
-          <a:bodyPr wrap="square" lIns="0" tIns="0" rIns="0" bIns="0" rtlCol="0" anchor="t">
-            <a:normAutofit/>
-          </a:bodyPr>
-          <a:lstStyle/>
-          <a:p>
-            <a:pPr marL="0" indent="0" algn="l">
-              <a:lnSpc>
-                <a:spcPts val="1890"/>
-              </a:lnSpc>
-              <a:buNone/>
-            </a:pPr>
-            <a:r>
-              <a:rPr lang="en-US" sz="1400" dirty="0">
-                <a:solidFill>
-                  <a:srgbClr val="3A4856"/>
-                </a:solidFill>
-                <a:latin typeface="Poppins" pitchFamily="34" charset="0"/>
-                <a:ea typeface="Poppins" pitchFamily="34" charset="-122"/>
-                <a:cs typeface="Poppins" pitchFamily="34" charset="-120"/>
-              </a:rPr>
-              <a:t>React 19, TypeScript, Vite: dashboard, chat, reports</a:t>
-            </a:r>
-            <a:endParaRPr lang="en-US" sz="1400" dirty="0"/>
-          </a:p>
-        </p:txBody>
-      </p:sp>
-      <p:sp>
-        <p:nvSpPr>
-          <p:cNvPr id="7" name="Shape 5"/>
-          <p:cNvSpPr/>
-          <p:nvPr/>
-        </p:nvSpPr>
-        <p:spPr>
-          <a:xfrm>
-            <a:off x="3498850" y="1567129"/>
-            <a:ext cx="2508250" cy="1578438"/>
-          </a:xfrm>
-          <a:prstGeom prst="roundRect">
-            <a:avLst>
-              <a:gd name="adj" fmla="val 8046"/>
-            </a:avLst>
-          </a:prstGeom>
-          <a:solidFill>
-            <a:srgbClr val="FFFFFF"/>
-          </a:solidFill>
-          <a:ln/>
-        </p:spPr>
-      </p:sp>
-      <p:sp>
-        <p:nvSpPr>
-          <p:cNvPr id="8" name="Shape 6"/>
-          <p:cNvSpPr/>
-          <p:nvPr/>
-        </p:nvSpPr>
-        <p:spPr>
-          <a:xfrm>
-            <a:off x="3498850" y="1567129"/>
-            <a:ext cx="2508250" cy="1578438"/>
-          </a:xfrm>
-          <a:custGeom>
-            <a:avLst/>
-            <a:gdLst/>
-            <a:ahLst/>
-            <a:cxnLst/>
-            <a:rect l="l" t="t" r="r" b="b"/>
-            <a:pathLst>
-              <a:path w="2508250" h="1578438">
-                <a:moveTo>
-                  <a:pt x="0" y="127000"/>
-                </a:moveTo>
-                <a:lnTo>
-                  <a:pt x="0" y="127000"/>
-                </a:lnTo>
-                <a:arcTo wR="127000" hR="127000" stAng="10800000" swAng="5400000"/>
-                <a:lnTo>
-                  <a:pt x="2381250" y="0"/>
-                </a:lnTo>
-                <a:arcTo wR="127000" hR="127000" stAng="16200000" swAng="5400000"/>
-                <a:lnTo>
-                  <a:pt x="2508250" y="127000"/>
-                </a:lnTo>
-                <a:arcTo wR="127000" hR="76200" stAng="0" swAng="-5400000"/>
-                <a:lnTo>
-                  <a:pt x="127000" y="50800"/>
-                </a:lnTo>
-                <a:arcTo wR="127000" hR="76200" stAng="16200000" swAng="-5400000"/>
-                <a:close/>
-              </a:path>
-            </a:pathLst>
-          </a:custGeom>
-          <a:solidFill>
-            <a:srgbClr val="14B8A6"/>
-          </a:solidFill>
-          <a:ln/>
-        </p:spPr>
-      </p:sp>
-      <p:sp>
-        <p:nvSpPr>
-          <p:cNvPr id="9" name="Text 7"/>
-          <p:cNvSpPr/>
-          <p:nvPr/>
-        </p:nvSpPr>
-        <p:spPr>
-          <a:xfrm>
-            <a:off x="3727450" y="1846529"/>
-            <a:ext cx="2112582" cy="299707"/>
-          </a:xfrm>
-          <a:prstGeom prst="rect">
-            <a:avLst/>
-          </a:prstGeom>
-          <a:noFill/>
-          <a:ln/>
-        </p:spPr>
-        <p:txBody>
-          <a:bodyPr wrap="square" lIns="0" tIns="0" rIns="0" bIns="0" rtlCol="0" anchor="t">
-            <a:normAutofit/>
-          </a:bodyPr>
-          <a:lstStyle/>
-          <a:p>
-            <a:pPr marL="0" indent="0" algn="l">
-              <a:lnSpc>
-                <a:spcPts val="2160"/>
-              </a:lnSpc>
-              <a:buNone/>
-            </a:pPr>
-            <a:r>
-              <a:rPr lang="en-US" sz="1800" b="1" dirty="0">
-                <a:solidFill>
-                  <a:srgbClr val="12202F"/>
-                </a:solidFill>
-                <a:latin typeface="Poppins" pitchFamily="34" charset="0"/>
-                <a:ea typeface="Poppins" pitchFamily="34" charset="-122"/>
-                <a:cs typeface="Poppins" pitchFamily="34" charset="-120"/>
-              </a:rPr>
-              <a:t>Backend</a:t>
-            </a:r>
-            <a:endParaRPr lang="en-US" sz="1800" dirty="0"/>
-          </a:p>
-        </p:txBody>
-      </p:sp>
-      <p:sp>
-        <p:nvSpPr>
-          <p:cNvPr id="10" name="Text 8"/>
-          <p:cNvSpPr/>
-          <p:nvPr/>
-        </p:nvSpPr>
-        <p:spPr>
-          <a:xfrm>
-            <a:off x="3727450" y="2197035"/>
-            <a:ext cx="2112582" cy="745331"/>
-          </a:xfrm>
-          <a:prstGeom prst="rect">
-            <a:avLst/>
-          </a:prstGeom>
-          <a:noFill/>
-          <a:ln/>
-        </p:spPr>
-        <p:txBody>
-          <a:bodyPr wrap="square" lIns="0" tIns="0" rIns="0" bIns="0" rtlCol="0" anchor="t">
-            <a:normAutofit/>
-          </a:bodyPr>
-          <a:lstStyle/>
-          <a:p>
-            <a:pPr marL="0" indent="0" algn="l">
-              <a:lnSpc>
-                <a:spcPts val="1890"/>
-              </a:lnSpc>
-              <a:buNone/>
-            </a:pPr>
-            <a:r>
-              <a:rPr lang="en-US" sz="1400" dirty="0">
-                <a:solidFill>
-                  <a:srgbClr val="3A4856"/>
-                </a:solidFill>
-                <a:latin typeface="Poppins" pitchFamily="34" charset="0"/>
-                <a:ea typeface="Poppins" pitchFamily="34" charset="-122"/>
-                <a:cs typeface="Poppins" pitchFamily="34" charset="-120"/>
-              </a:rPr>
-              <a:t>Node.js + Express 5: REST API, validation, rate limits</a:t>
-            </a:r>
-            <a:endParaRPr lang="en-US" sz="1400" dirty="0"/>
-          </a:p>
-        </p:txBody>
-      </p:sp>
-      <p:sp>
-        <p:nvSpPr>
-          <p:cNvPr id="11" name="Shape 9"/>
-          <p:cNvSpPr/>
-          <p:nvPr/>
-        </p:nvSpPr>
-        <p:spPr>
-          <a:xfrm>
-            <a:off x="6184900" y="1567129"/>
-            <a:ext cx="2508250" cy="1578438"/>
-          </a:xfrm>
-          <a:prstGeom prst="roundRect">
-            <a:avLst>
-              <a:gd name="adj" fmla="val 8046"/>
-            </a:avLst>
-          </a:prstGeom>
-          <a:solidFill>
-            <a:srgbClr val="FFFFFF"/>
-          </a:solidFill>
-          <a:ln/>
-        </p:spPr>
-      </p:sp>
-      <p:sp>
-        <p:nvSpPr>
-          <p:cNvPr id="12" name="Shape 10"/>
-          <p:cNvSpPr/>
-          <p:nvPr/>
-        </p:nvSpPr>
-        <p:spPr>
-          <a:xfrm>
-            <a:off x="6184900" y="1567129"/>
-            <a:ext cx="2508250" cy="1578438"/>
-          </a:xfrm>
-          <a:custGeom>
-            <a:avLst/>
-            <a:gdLst/>
-            <a:ahLst/>
-            <a:cxnLst/>
-            <a:rect l="l" t="t" r="r" b="b"/>
-            <a:pathLst>
-              <a:path w="2508250" h="1578438">
-                <a:moveTo>
-                  <a:pt x="0" y="127000"/>
-                </a:moveTo>
-                <a:lnTo>
-                  <a:pt x="0" y="127000"/>
-                </a:lnTo>
-                <a:arcTo wR="127000" hR="127000" stAng="10800000" swAng="5400000"/>
-                <a:lnTo>
-                  <a:pt x="2381250" y="0"/>
-                </a:lnTo>
-                <a:arcTo wR="127000" hR="127000" stAng="16200000" swAng="5400000"/>
-                <a:lnTo>
-                  <a:pt x="2508250" y="127000"/>
-                </a:lnTo>
-                <a:arcTo wR="127000" hR="76200" stAng="0" swAng="-5400000"/>
-                <a:lnTo>
-                  <a:pt x="127000" y="50800"/>
-                </a:lnTo>
-                <a:arcTo wR="127000" hR="76200" stAng="16200000" swAng="-5400000"/>
-                <a:close/>
-              </a:path>
-            </a:pathLst>
-          </a:custGeom>
-          <a:solidFill>
-            <a:srgbClr val="14B8A6"/>
-          </a:solidFill>
-          <a:ln/>
-        </p:spPr>
-      </p:sp>
-      <p:sp>
-        <p:nvSpPr>
-          <p:cNvPr id="13" name="Text 11"/>
-          <p:cNvSpPr/>
-          <p:nvPr/>
-        </p:nvSpPr>
-        <p:spPr>
-          <a:xfrm>
-            <a:off x="6413500" y="1846529"/>
-            <a:ext cx="2112582" cy="299707"/>
-          </a:xfrm>
-          <a:prstGeom prst="rect">
-            <a:avLst/>
-          </a:prstGeom>
-          <a:noFill/>
-          <a:ln/>
-        </p:spPr>
-        <p:txBody>
-          <a:bodyPr wrap="square" lIns="0" tIns="0" rIns="0" bIns="0" rtlCol="0" anchor="t">
-            <a:normAutofit/>
-          </a:bodyPr>
-          <a:lstStyle/>
-          <a:p>
-            <a:pPr marL="0" indent="0" algn="l">
-              <a:lnSpc>
-                <a:spcPts val="2160"/>
-              </a:lnSpc>
-              <a:buNone/>
-            </a:pPr>
-            <a:r>
-              <a:rPr lang="en-US" sz="1800" b="1" dirty="0">
-                <a:solidFill>
-                  <a:srgbClr val="12202F"/>
-                </a:solidFill>
-                <a:latin typeface="Poppins" pitchFamily="34" charset="0"/>
-                <a:ea typeface="Poppins" pitchFamily="34" charset="-122"/>
-                <a:cs typeface="Poppins" pitchFamily="34" charset="-120"/>
-              </a:rPr>
-              <a:t>Local AI</a:t>
-            </a:r>
-            <a:endParaRPr lang="en-US" sz="1800" dirty="0"/>
-          </a:p>
-        </p:txBody>
-      </p:sp>
-      <p:sp>
-        <p:nvSpPr>
-          <p:cNvPr id="14" name="Text 12"/>
-          <p:cNvSpPr/>
-          <p:nvPr/>
-        </p:nvSpPr>
-        <p:spPr>
-          <a:xfrm>
-            <a:off x="6413500" y="2197035"/>
-            <a:ext cx="2112582" cy="505354"/>
-          </a:xfrm>
-          <a:prstGeom prst="rect">
-            <a:avLst/>
-          </a:prstGeom>
-          <a:noFill/>
-          <a:ln/>
-        </p:spPr>
-        <p:txBody>
-          <a:bodyPr wrap="square" lIns="0" tIns="0" rIns="0" bIns="0" rtlCol="0" anchor="t">
-            <a:normAutofit/>
-          </a:bodyPr>
-          <a:lstStyle/>
-          <a:p>
-            <a:pPr marL="0" indent="0" algn="l">
-              <a:lnSpc>
-                <a:spcPts val="1890"/>
-              </a:lnSpc>
-              <a:buNone/>
-            </a:pPr>
-            <a:r>
-              <a:rPr lang="en-US" sz="1400" dirty="0">
-                <a:solidFill>
-                  <a:srgbClr val="3A4856"/>
-                </a:solidFill>
-                <a:latin typeface="Poppins" pitchFamily="34" charset="0"/>
-                <a:ea typeface="Poppins" pitchFamily="34" charset="-122"/>
-                <a:cs typeface="Poppins" pitchFamily="34" charset="-120"/>
-              </a:rPr>
-              <a:t>LM Studio + Qwen 2.5 7B for tool calling</a:t>
-            </a:r>
-            <a:endParaRPr lang="en-US" sz="1400" dirty="0"/>
-          </a:p>
-        </p:txBody>
-      </p:sp>
-      <p:sp>
-        <p:nvSpPr>
-          <p:cNvPr id="15" name="Shape 13"/>
-          <p:cNvSpPr/>
-          <p:nvPr/>
-        </p:nvSpPr>
-        <p:spPr>
-          <a:xfrm>
-            <a:off x="8870950" y="1567129"/>
-            <a:ext cx="2508250" cy="1578438"/>
-          </a:xfrm>
-          <a:prstGeom prst="roundRect">
-            <a:avLst>
-              <a:gd name="adj" fmla="val 8046"/>
-            </a:avLst>
-          </a:prstGeom>
-          <a:solidFill>
-            <a:srgbClr val="FFFFFF"/>
-          </a:solidFill>
-          <a:ln/>
-        </p:spPr>
-      </p:sp>
-      <p:sp>
-        <p:nvSpPr>
-          <p:cNvPr id="16" name="Shape 14"/>
-          <p:cNvSpPr/>
-          <p:nvPr/>
-        </p:nvSpPr>
-        <p:spPr>
-          <a:xfrm>
-            <a:off x="8870950" y="1567129"/>
-            <a:ext cx="2508250" cy="1578438"/>
-          </a:xfrm>
-          <a:custGeom>
-            <a:avLst/>
-            <a:gdLst/>
-            <a:ahLst/>
-            <a:cxnLst/>
-            <a:rect l="l" t="t" r="r" b="b"/>
-            <a:pathLst>
-              <a:path w="2508250" h="1578438">
-                <a:moveTo>
-                  <a:pt x="0" y="127000"/>
-                </a:moveTo>
-                <a:lnTo>
-                  <a:pt x="0" y="127000"/>
-                </a:lnTo>
-                <a:arcTo wR="127000" hR="127000" stAng="10800000" swAng="5400000"/>
-                <a:lnTo>
-                  <a:pt x="2381250" y="0"/>
-                </a:lnTo>
-                <a:arcTo wR="127000" hR="127000" stAng="16200000" swAng="5400000"/>
-                <a:lnTo>
-                  <a:pt x="2508250" y="127000"/>
-                </a:lnTo>
-                <a:arcTo wR="127000" hR="76200" stAng="0" swAng="-5400000"/>
-                <a:lnTo>
-                  <a:pt x="127000" y="50800"/>
-                </a:lnTo>
-                <a:arcTo wR="127000" hR="76200" stAng="16200000" swAng="-5400000"/>
-                <a:close/>
-              </a:path>
-            </a:pathLst>
-          </a:custGeom>
-          <a:solidFill>
-            <a:srgbClr val="14B8A6"/>
-          </a:solidFill>
-          <a:ln/>
-        </p:spPr>
-      </p:sp>
-      <p:sp>
-        <p:nvSpPr>
-          <p:cNvPr id="17" name="Text 15"/>
-          <p:cNvSpPr/>
-          <p:nvPr/>
-        </p:nvSpPr>
-        <p:spPr>
-          <a:xfrm>
-            <a:off x="9099550" y="1846529"/>
-            <a:ext cx="2112582" cy="299707"/>
-          </a:xfrm>
-          <a:prstGeom prst="rect">
-            <a:avLst/>
-          </a:prstGeom>
-          <a:noFill/>
-          <a:ln/>
-        </p:spPr>
-        <p:txBody>
-          <a:bodyPr wrap="square" lIns="0" tIns="0" rIns="0" bIns="0" rtlCol="0" anchor="t">
-            <a:normAutofit/>
-          </a:bodyPr>
-          <a:lstStyle/>
-          <a:p>
-            <a:pPr marL="0" indent="0" algn="l">
-              <a:lnSpc>
-                <a:spcPts val="2160"/>
-              </a:lnSpc>
-              <a:buNone/>
-            </a:pPr>
-            <a:r>
-              <a:rPr lang="en-US" sz="1800" b="1" dirty="0">
-                <a:solidFill>
-                  <a:srgbClr val="12202F"/>
-                </a:solidFill>
-                <a:latin typeface="Poppins" pitchFamily="34" charset="0"/>
-                <a:ea typeface="Poppins" pitchFamily="34" charset="-122"/>
-                <a:cs typeface="Poppins" pitchFamily="34" charset="-120"/>
-              </a:rPr>
-              <a:t>Database</a:t>
-            </a:r>
-            <a:endParaRPr lang="en-US" sz="1800" dirty="0"/>
-          </a:p>
-        </p:txBody>
-      </p:sp>
-      <p:sp>
-        <p:nvSpPr>
-          <p:cNvPr id="18" name="Text 16"/>
-          <p:cNvSpPr/>
-          <p:nvPr/>
-        </p:nvSpPr>
-        <p:spPr>
-          <a:xfrm>
-            <a:off x="9099550" y="2197035"/>
-            <a:ext cx="2112582" cy="745331"/>
-          </a:xfrm>
-          <a:prstGeom prst="rect">
-            <a:avLst/>
-          </a:prstGeom>
-          <a:noFill/>
-          <a:ln/>
-        </p:spPr>
-        <p:txBody>
-          <a:bodyPr wrap="square" lIns="0" tIns="0" rIns="0" bIns="0" rtlCol="0" anchor="t">
-            <a:normAutofit/>
-          </a:bodyPr>
-          <a:lstStyle/>
-          <a:p>
-            <a:pPr marL="0" indent="0" algn="l">
-              <a:lnSpc>
-                <a:spcPts val="1890"/>
-              </a:lnSpc>
-              <a:buNone/>
-            </a:pPr>
-            <a:r>
-              <a:rPr lang="en-US" sz="1400" dirty="0">
-                <a:solidFill>
-                  <a:srgbClr val="3A4856"/>
-                </a:solidFill>
-                <a:latin typeface="Poppins" pitchFamily="34" charset="0"/>
-                <a:ea typeface="Poppins" pitchFamily="34" charset="-122"/>
-                <a:cs typeface="Poppins" pitchFamily="34" charset="-120"/>
-              </a:rPr>
-              <a:t>SQLite via better-sqlite3, prepared statements</a:t>
-            </a:r>
-            <a:endParaRPr lang="en-US" sz="1400" dirty="0"/>
-          </a:p>
-        </p:txBody>
-      </p:sp>
-      <p:sp>
-        <p:nvSpPr>
-          <p:cNvPr id="19" name="Text 17"/>
-          <p:cNvSpPr/>
-          <p:nvPr/>
-        </p:nvSpPr>
-        <p:spPr>
-          <a:xfrm>
-            <a:off x="812800" y="3424966"/>
-            <a:ext cx="10883392" cy="292100"/>
-          </a:xfrm>
-          <a:prstGeom prst="rect">
-            <a:avLst/>
-          </a:prstGeom>
-          <a:noFill/>
-          <a:ln/>
-        </p:spPr>
-        <p:txBody>
-          <a:bodyPr wrap="square" lIns="0" tIns="0" rIns="0" bIns="0" rtlCol="0" anchor="t">
-            <a:normAutofit/>
-          </a:bodyPr>
-          <a:lstStyle/>
-          <a:p>
-            <a:pPr marL="0" indent="0" algn="l">
-              <a:lnSpc>
-                <a:spcPts val="2100"/>
-              </a:lnSpc>
-              <a:buNone/>
-            </a:pPr>
-            <a:r>
-              <a:rPr lang="en-US" sz="1500" b="1" dirty="0">
-                <a:solidFill>
-                  <a:srgbClr val="0B7A6E"/>
-                </a:solidFill>
-                <a:latin typeface="Poppins" pitchFamily="34" charset="0"/>
-                <a:ea typeface="Poppins" pitchFamily="34" charset="-122"/>
-                <a:cs typeface="Poppins" pitchFamily="34" charset="-120"/>
-              </a:rPr>
-              <a:t>Voice path: browser audio → /api/transcribe → Whisper.cpp → chat</a:t>
-            </a:r>
-            <a:endParaRPr lang="en-US" sz="1500" dirty="0"/>
-          </a:p>
-        </p:txBody>
-      </p:sp>
-      <p:sp>
-        <p:nvSpPr>
-          <p:cNvPr id="20" name="Text 18"/>
-          <p:cNvSpPr/>
-          <p:nvPr/>
-        </p:nvSpPr>
-        <p:spPr>
-          <a:xfrm>
-            <a:off x="812800" y="6238280"/>
-            <a:ext cx="1176179" cy="238720"/>
-          </a:xfrm>
-          <a:prstGeom prst="rect">
-            <a:avLst/>
-          </a:prstGeom>
-          <a:noFill/>
-          <a:ln/>
-        </p:spPr>
-        <p:txBody>
-          <a:bodyPr wrap="square" lIns="0" tIns="0" rIns="0" bIns="0" rtlCol="0" anchor="t">
-            <a:normAutofit/>
-          </a:bodyPr>
-          <a:lstStyle/>
-          <a:p>
-            <a:pPr marL="0" indent="0" algn="l">
-              <a:lnSpc>
-                <a:spcPts val="1680"/>
-              </a:lnSpc>
-              <a:buNone/>
-            </a:pPr>
-            <a:r>
-              <a:rPr lang="en-US" sz="1200" dirty="0">
-                <a:solidFill>
-                  <a:srgbClr val="5B6773"/>
-                </a:solidFill>
-                <a:latin typeface="Poppins" pitchFamily="34" charset="0"/>
-                <a:ea typeface="Poppins" pitchFamily="34" charset="-122"/>
-                <a:cs typeface="Poppins" pitchFamily="34" charset="-120"/>
-              </a:rPr>
-              <a:t>HisabBot · 05</a:t>
-            </a:r>
-            <a:endParaRPr lang="en-US" sz="1200" dirty="0"/>
-          </a:p>
-        </p:txBody>
-      </p:sp>
-    </p:spTree>
-  </p:cSld>
-  <p:clrMapOvr>
-    <a:masterClrMapping/>
-  </p:clrMapOvr>
-  <p:timing>
-    <p:tnLst>
-      <p:par>
-        <p:cTn id="1" dur="indefinite" restart="never" nodeType="tmRoot"/>
-      </p:par>
-    </p:tnLst>
-  </p:timing>
-</p:sld>
-</file>
-
-<file path=ppt/slides/slide6.xml><?xml version="1.0" encoding="utf-8"?>
 <p:sld xmlns:a="http://schemas.openxmlformats.org/drawingml/2006/main" xmlns:r="http://schemas.openxmlformats.org/officeDocument/2006/relationships" xmlns:p="http://schemas.openxmlformats.org/presentationml/2006/main">
   <p:cSld>
     <p:spTree>
@@ -7522,7 +6011,7 @@
         <p:spPr>
           <a:xfrm>
             <a:off x="426719" y="6031916"/>
-            <a:ext cx="11313523" cy="646331"/>
+            <a:ext cx="11313523" cy="338554"/>
           </a:xfrm>
           <a:prstGeom prst="rect">
             <a:avLst/>
@@ -7535,7 +6024,7 @@
           <a:lstStyle/>
           <a:p>
             <a:r>
-              <a:rPr lang="en-US" b="1" i="1" dirty="0">
+              <a:rPr lang="en-US" sz="1600" b="1" i="1" dirty="0">
                 <a:solidFill>
                   <a:schemeClr val="accent2"/>
                 </a:solidFill>
@@ -7544,7 +6033,7 @@
               <a:t>Voice path: browser audio → /</a:t>
             </a:r>
             <a:r>
-              <a:rPr lang="en-US" b="1" i="1" dirty="0" err="1">
+              <a:rPr lang="en-US" sz="1600" b="1" i="1" dirty="0" err="1">
                 <a:solidFill>
                   <a:schemeClr val="accent2"/>
                 </a:solidFill>
@@ -7553,38 +6042,14 @@
               <a:t>api</a:t>
             </a:r>
             <a:r>
-              <a:rPr lang="en-US" b="1" i="1" dirty="0">
+              <a:rPr lang="en-US" sz="1600" b="1" i="1" dirty="0">
                 <a:solidFill>
                   <a:schemeClr val="accent2"/>
                 </a:solidFill>
                 <a:latin typeface="Aptos"/>
               </a:rPr>
-              <a:t>/transcribe → local transcription </a:t>
-            </a:r>
-            <a:r>
-              <a:rPr lang="en-US" b="1" i="1" dirty="0" smtClean="0">
-                <a:solidFill>
-                  <a:schemeClr val="accent2"/>
-                </a:solidFill>
-                <a:latin typeface="Aptos"/>
-              </a:rPr>
-              <a:t>service (WHISPER.CPP) </a:t>
-            </a:r>
-            <a:r>
-              <a:rPr lang="en-US" b="1" i="1" dirty="0">
-                <a:solidFill>
-                  <a:schemeClr val="accent2"/>
-                </a:solidFill>
-                <a:latin typeface="Aptos"/>
-              </a:rPr>
-              <a:t>→ transcript returned to chat.</a:t>
-            </a:r>
-            <a:endParaRPr lang="en-US" b="1" i="1" dirty="0">
-              <a:solidFill>
-                <a:schemeClr val="accent2"/>
-              </a:solidFill>
-              <a:latin typeface="Aptos"/>
-            </a:endParaRPr>
+              <a:t>/transcribe → local transcription service (WHISPER.CPP) → transcript returned to chat.</a:t>
+            </a:r>
           </a:p>
         </p:txBody>
       </p:sp>
@@ -7598,17 +6063,10 @@
   <p:clrMapOvr>
     <a:masterClrMapping/>
   </p:clrMapOvr>
-  <p:timing>
-    <p:tnLst>
-      <p:par>
-        <p:cTn id="1" dur="indefinite" restart="never" nodeType="tmRoot"/>
-      </p:par>
-    </p:tnLst>
-  </p:timing>
 </p:sld>
 </file>
 
-<file path=ppt/slides/slide7.xml><?xml version="1.0" encoding="utf-8"?>
+<file path=ppt/slides/slide6.xml><?xml version="1.0" encoding="utf-8"?>
 <p:sld xmlns:a="http://schemas.openxmlformats.org/drawingml/2006/main" xmlns:r="http://schemas.openxmlformats.org/officeDocument/2006/relationships" xmlns:p="http://schemas.openxmlformats.org/presentationml/2006/main">
   <p:cSld name="Slide 6">
     <p:bg>
@@ -8722,17 +7180,10 @@
   <p:clrMapOvr>
     <a:masterClrMapping/>
   </p:clrMapOvr>
-  <p:timing>
-    <p:tnLst>
-      <p:par>
-        <p:cTn id="1" dur="indefinite" restart="never" nodeType="tmRoot"/>
-      </p:par>
-    </p:tnLst>
-  </p:timing>
 </p:sld>
 </file>
 
-<file path=ppt/slides/slide8.xml><?xml version="1.0" encoding="utf-8"?>
+<file path=ppt/slides/slide7.xml><?xml version="1.0" encoding="utf-8"?>
 <p:sld xmlns:a="http://schemas.openxmlformats.org/drawingml/2006/main" xmlns:r="http://schemas.openxmlformats.org/officeDocument/2006/relationships" xmlns:p="http://schemas.openxmlformats.org/presentationml/2006/main">
   <p:cSld name="Slide 7">
     <p:bg>
@@ -9530,17 +7981,10 @@
   <p:clrMapOvr>
     <a:masterClrMapping/>
   </p:clrMapOvr>
-  <p:timing>
-    <p:tnLst>
-      <p:par>
-        <p:cTn id="1" dur="indefinite" restart="never" nodeType="tmRoot"/>
-      </p:par>
-    </p:tnLst>
-  </p:timing>
 </p:sld>
 </file>
 
-<file path=ppt/slides/slide9.xml><?xml version="1.0" encoding="utf-8"?>
+<file path=ppt/slides/slide8.xml><?xml version="1.0" encoding="utf-8"?>
 <p:sld xmlns:a="http://schemas.openxmlformats.org/drawingml/2006/main" xmlns:r="http://schemas.openxmlformats.org/officeDocument/2006/relationships" xmlns:p="http://schemas.openxmlformats.org/presentationml/2006/main">
   <p:cSld name="Slide 8">
     <p:bg>
@@ -10610,13 +9054,575 @@
   <p:clrMapOvr>
     <a:masterClrMapping/>
   </p:clrMapOvr>
-  <p:timing>
-    <p:tnLst>
-      <p:par>
-        <p:cTn id="1" dur="indefinite" restart="never" nodeType="tmRoot"/>
-      </p:par>
-    </p:tnLst>
-  </p:timing>
+</p:sld>
+</file>
+
+<file path=ppt/slides/slide9.xml><?xml version="1.0" encoding="utf-8"?>
+<p:sld xmlns:a="http://schemas.openxmlformats.org/drawingml/2006/main" xmlns:r="http://schemas.openxmlformats.org/officeDocument/2006/relationships" xmlns:p="http://schemas.openxmlformats.org/presentationml/2006/main">
+  <p:cSld name="Slide 9">
+    <p:bg>
+      <p:bgPr>
+        <a:solidFill>
+          <a:srgbClr val="F6F4EE"/>
+        </a:solidFill>
+        <a:effectLst/>
+      </p:bgPr>
+    </p:bg>
+    <p:spTree>
+      <p:nvGrpSpPr>
+        <p:cNvPr id="1" name=""/>
+        <p:cNvGrpSpPr/>
+        <p:nvPr/>
+      </p:nvGrpSpPr>
+      <p:grpSpPr>
+        <a:xfrm>
+          <a:off x="0" y="0"/>
+          <a:ext cx="0" cy="0"/>
+          <a:chOff x="0" y="0"/>
+          <a:chExt cx="0" cy="0"/>
+        </a:xfrm>
+      </p:grpSpPr>
+      <p:sp>
+        <p:nvSpPr>
+          <p:cNvPr id="2" name="Text 0"/>
+          <p:cNvSpPr>
+            <a:spLocks noGrp="1"/>
+          </p:cNvSpPr>
+          <p:nvPr>
+            <p:ph type="title"/>
+          </p:nvPr>
+        </p:nvSpPr>
+        <p:spPr>
+          <a:xfrm>
+            <a:off x="812800" y="812800"/>
+            <a:ext cx="10883392" cy="500327"/>
+          </a:xfrm>
+          <a:prstGeom prst="rect">
+            <a:avLst/>
+          </a:prstGeom>
+          <a:noFill/>
+          <a:ln/>
+        </p:spPr>
+        <p:txBody>
+          <a:bodyPr wrap="square" lIns="0" tIns="0" rIns="0" bIns="0" rtlCol="0" anchor="t">
+            <a:normAutofit/>
+          </a:bodyPr>
+          <a:lstStyle/>
+          <a:p>
+            <a:pPr marL="0" indent="0" algn="l">
+              <a:lnSpc>
+                <a:spcPts val="3740"/>
+              </a:lnSpc>
+              <a:buNone/>
+            </a:pPr>
+            <a:r>
+              <a:rPr lang="en-US" sz="3400" b="1" i="0" dirty="0">
+                <a:solidFill>
+                  <a:srgbClr val="12202F"/>
+                </a:solidFill>
+                <a:latin typeface="Poppins" pitchFamily="34" charset="0"/>
+                <a:ea typeface="Poppins" pitchFamily="34" charset="-122"/>
+                <a:cs typeface="Poppins" pitchFamily="34" charset="-120"/>
+              </a:rPr>
+              <a:t>Limitations &amp; Next Steps</a:t>
+            </a:r>
+            <a:endParaRPr lang="en-US" sz="3400" dirty="0"/>
+          </a:p>
+        </p:txBody>
+      </p:sp>
+      <p:sp>
+        <p:nvSpPr>
+          <p:cNvPr id="3" name="Shape 1"/>
+          <p:cNvSpPr/>
+          <p:nvPr/>
+        </p:nvSpPr>
+        <p:spPr>
+          <a:xfrm>
+            <a:off x="812800" y="1567129"/>
+            <a:ext cx="5194300" cy="1986029"/>
+          </a:xfrm>
+          <a:prstGeom prst="roundRect">
+            <a:avLst>
+              <a:gd name="adj" fmla="val 6395"/>
+            </a:avLst>
+          </a:prstGeom>
+          <a:solidFill>
+            <a:srgbClr val="FFFFFF"/>
+          </a:solidFill>
+          <a:ln/>
+        </p:spPr>
+      </p:sp>
+      <p:sp>
+        <p:nvSpPr>
+          <p:cNvPr id="4" name="Shape 2"/>
+          <p:cNvSpPr/>
+          <p:nvPr/>
+        </p:nvSpPr>
+        <p:spPr>
+          <a:xfrm>
+            <a:off x="812800" y="1567129"/>
+            <a:ext cx="5194300" cy="1986029"/>
+          </a:xfrm>
+          <a:custGeom>
+            <a:avLst/>
+            <a:gdLst/>
+            <a:ahLst/>
+            <a:cxnLst/>
+            <a:rect l="l" t="t" r="r" b="b"/>
+            <a:pathLst>
+              <a:path w="5194300" h="1986029">
+                <a:moveTo>
+                  <a:pt x="0" y="127000"/>
+                </a:moveTo>
+                <a:lnTo>
+                  <a:pt x="0" y="127000"/>
+                </a:lnTo>
+                <a:arcTo wR="127000" hR="127000" stAng="10800000" swAng="5400000"/>
+                <a:lnTo>
+                  <a:pt x="5067300" y="0"/>
+                </a:lnTo>
+                <a:arcTo wR="127000" hR="127000" stAng="16200000" swAng="5400000"/>
+                <a:lnTo>
+                  <a:pt x="5194300" y="127000"/>
+                </a:lnTo>
+                <a:arcTo wR="127000" hR="76200" stAng="0" swAng="-5400000"/>
+                <a:lnTo>
+                  <a:pt x="127000" y="50800"/>
+                </a:lnTo>
+                <a:arcTo wR="127000" hR="76200" stAng="16200000" swAng="-5400000"/>
+                <a:close/>
+              </a:path>
+            </a:pathLst>
+          </a:custGeom>
+          <a:solidFill>
+            <a:srgbClr val="F2B544"/>
+          </a:solidFill>
+          <a:ln/>
+        </p:spPr>
+      </p:sp>
+      <p:sp>
+        <p:nvSpPr>
+          <p:cNvPr id="5" name="Text 3"/>
+          <p:cNvSpPr/>
+          <p:nvPr/>
+        </p:nvSpPr>
+        <p:spPr>
+          <a:xfrm>
+            <a:off x="1066800" y="1871929"/>
+            <a:ext cx="4826889" cy="314920"/>
+          </a:xfrm>
+          <a:prstGeom prst="rect">
+            <a:avLst/>
+          </a:prstGeom>
+          <a:noFill/>
+          <a:ln/>
+        </p:spPr>
+        <p:txBody>
+          <a:bodyPr wrap="square" lIns="0" tIns="0" rIns="0" bIns="0" rtlCol="0" anchor="t">
+            <a:normAutofit/>
+          </a:bodyPr>
+          <a:lstStyle/>
+          <a:p>
+            <a:pPr marL="0" indent="0" algn="l">
+              <a:lnSpc>
+                <a:spcPts val="2280"/>
+              </a:lnSpc>
+              <a:buNone/>
+            </a:pPr>
+            <a:r>
+              <a:rPr lang="en-US" sz="1900" b="1" dirty="0">
+                <a:solidFill>
+                  <a:srgbClr val="12202F"/>
+                </a:solidFill>
+                <a:latin typeface="Poppins" pitchFamily="34" charset="0"/>
+                <a:ea typeface="Poppins" pitchFamily="34" charset="-122"/>
+                <a:cs typeface="Poppins" pitchFamily="34" charset="-120"/>
+              </a:rPr>
+              <a:t>Today</a:t>
+            </a:r>
+            <a:endParaRPr lang="en-US" sz="1900" dirty="0"/>
+          </a:p>
+        </p:txBody>
+      </p:sp>
+      <p:sp>
+        <p:nvSpPr>
+          <p:cNvPr id="6" name="Text 4"/>
+          <p:cNvSpPr/>
+          <p:nvPr/>
+        </p:nvSpPr>
+        <p:spPr>
+          <a:xfrm>
+            <a:off x="1099058" y="2161449"/>
+            <a:ext cx="4787773" cy="1163108"/>
+          </a:xfrm>
+          <a:prstGeom prst="rect">
+            <a:avLst/>
+          </a:prstGeom>
+          <a:noFill/>
+          <a:ln/>
+        </p:spPr>
+        <p:txBody>
+          <a:bodyPr wrap="square" lIns="0" tIns="0" rIns="0" bIns="0" rtlCol="0" anchor="t">
+            <a:normAutofit/>
+          </a:bodyPr>
+          <a:lstStyle/>
+          <a:p>
+            <a:pPr marL="196342" indent="-196342" algn="l">
+              <a:lnSpc>
+                <a:spcPts val="2240"/>
+              </a:lnSpc>
+              <a:buSzPct val="100000"/>
+              <a:buChar char="•"/>
+            </a:pPr>
+            <a:r>
+              <a:rPr lang="en-US" sz="1600" dirty="0">
+                <a:solidFill>
+                  <a:srgbClr val="3A4856"/>
+                </a:solidFill>
+                <a:latin typeface="Poppins" pitchFamily="34" charset="0"/>
+                <a:ea typeface="Poppins" pitchFamily="34" charset="-122"/>
+                <a:cs typeface="Poppins" pitchFamily="34" charset="-120"/>
+              </a:rPr>
+              <a:t>Chat needs local Qwen running</a:t>
+            </a:r>
+            <a:endParaRPr lang="en-US" sz="1600" dirty="0"/>
+          </a:p>
+          <a:p>
+            <a:pPr marL="196342" indent="-196342" algn="l">
+              <a:lnSpc>
+                <a:spcPts val="2240"/>
+              </a:lnSpc>
+              <a:buSzPct val="100000"/>
+              <a:buChar char="•"/>
+            </a:pPr>
+            <a:r>
+              <a:rPr lang="en-US" sz="1600" dirty="0">
+                <a:solidFill>
+                  <a:srgbClr val="3A4856"/>
+                </a:solidFill>
+                <a:latin typeface="Poppins" pitchFamily="34" charset="0"/>
+                <a:ea typeface="Poppins" pitchFamily="34" charset="-122"/>
+                <a:cs typeface="Poppins" pitchFamily="34" charset="-120"/>
+              </a:rPr>
+              <a:t>Voice needs Whisper and FFmpeg</a:t>
+            </a:r>
+            <a:endParaRPr lang="en-US" sz="1600" dirty="0"/>
+          </a:p>
+          <a:p>
+            <a:pPr marL="196342" indent="-196342" algn="l">
+              <a:lnSpc>
+                <a:spcPts val="2240"/>
+              </a:lnSpc>
+              <a:buSzPct val="100000"/>
+              <a:buChar char="•"/>
+            </a:pPr>
+            <a:r>
+              <a:rPr lang="en-US" sz="1600" dirty="0">
+                <a:solidFill>
+                  <a:srgbClr val="3A4856"/>
+                </a:solidFill>
+                <a:latin typeface="Poppins" pitchFamily="34" charset="0"/>
+                <a:ea typeface="Poppins" pitchFamily="34" charset="-122"/>
+                <a:cs typeface="Poppins" pitchFamily="34" charset="-120"/>
+              </a:rPr>
+              <a:t>No authentication yet</a:t>
+            </a:r>
+            <a:endParaRPr lang="en-US" sz="1600" dirty="0"/>
+          </a:p>
+          <a:p>
+            <a:pPr marL="196342" indent="-196342" algn="l">
+              <a:lnSpc>
+                <a:spcPts val="2240"/>
+              </a:lnSpc>
+              <a:buSzPct val="100000"/>
+              <a:buChar char="•"/>
+            </a:pPr>
+            <a:r>
+              <a:rPr lang="en-US" sz="1600" dirty="0">
+                <a:solidFill>
+                  <a:srgbClr val="3A4856"/>
+                </a:solidFill>
+                <a:latin typeface="Poppins" pitchFamily="34" charset="0"/>
+                <a:ea typeface="Poppins" pitchFamily="34" charset="-122"/>
+                <a:cs typeface="Poppins" pitchFamily="34" charset="-120"/>
+              </a:rPr>
+              <a:t>Chat history in browser storage</a:t>
+            </a:r>
+            <a:endParaRPr lang="en-US" sz="1600" dirty="0"/>
+          </a:p>
+        </p:txBody>
+      </p:sp>
+      <p:sp>
+        <p:nvSpPr>
+          <p:cNvPr id="7" name="Shape 5"/>
+          <p:cNvSpPr/>
+          <p:nvPr/>
+        </p:nvSpPr>
+        <p:spPr>
+          <a:xfrm>
+            <a:off x="6184900" y="1567129"/>
+            <a:ext cx="5194300" cy="1986029"/>
+          </a:xfrm>
+          <a:prstGeom prst="roundRect">
+            <a:avLst>
+              <a:gd name="adj" fmla="val 6395"/>
+            </a:avLst>
+          </a:prstGeom>
+          <a:solidFill>
+            <a:srgbClr val="FFFFFF"/>
+          </a:solidFill>
+          <a:ln/>
+        </p:spPr>
+      </p:sp>
+      <p:sp>
+        <p:nvSpPr>
+          <p:cNvPr id="8" name="Shape 6"/>
+          <p:cNvSpPr/>
+          <p:nvPr/>
+        </p:nvSpPr>
+        <p:spPr>
+          <a:xfrm>
+            <a:off x="6184900" y="1567129"/>
+            <a:ext cx="5194300" cy="1986029"/>
+          </a:xfrm>
+          <a:custGeom>
+            <a:avLst/>
+            <a:gdLst/>
+            <a:ahLst/>
+            <a:cxnLst/>
+            <a:rect l="l" t="t" r="r" b="b"/>
+            <a:pathLst>
+              <a:path w="5194300" h="1986029">
+                <a:moveTo>
+                  <a:pt x="0" y="127000"/>
+                </a:moveTo>
+                <a:lnTo>
+                  <a:pt x="0" y="127000"/>
+                </a:lnTo>
+                <a:arcTo wR="127000" hR="127000" stAng="10800000" swAng="5400000"/>
+                <a:lnTo>
+                  <a:pt x="5067300" y="0"/>
+                </a:lnTo>
+                <a:arcTo wR="127000" hR="127000" stAng="16200000" swAng="5400000"/>
+                <a:lnTo>
+                  <a:pt x="5194300" y="127000"/>
+                </a:lnTo>
+                <a:arcTo wR="127000" hR="76200" stAng="0" swAng="-5400000"/>
+                <a:lnTo>
+                  <a:pt x="127000" y="50800"/>
+                </a:lnTo>
+                <a:arcTo wR="127000" hR="76200" stAng="16200000" swAng="-5400000"/>
+                <a:close/>
+              </a:path>
+            </a:pathLst>
+          </a:custGeom>
+          <a:solidFill>
+            <a:srgbClr val="14B8A6"/>
+          </a:solidFill>
+          <a:ln/>
+        </p:spPr>
+      </p:sp>
+      <p:sp>
+        <p:nvSpPr>
+          <p:cNvPr id="9" name="Text 7"/>
+          <p:cNvSpPr/>
+          <p:nvPr/>
+        </p:nvSpPr>
+        <p:spPr>
+          <a:xfrm>
+            <a:off x="6438900" y="1871929"/>
+            <a:ext cx="4826889" cy="314920"/>
+          </a:xfrm>
+          <a:prstGeom prst="rect">
+            <a:avLst/>
+          </a:prstGeom>
+          <a:noFill/>
+          <a:ln/>
+        </p:spPr>
+        <p:txBody>
+          <a:bodyPr wrap="square" lIns="0" tIns="0" rIns="0" bIns="0" rtlCol="0" anchor="t">
+            <a:normAutofit/>
+          </a:bodyPr>
+          <a:lstStyle/>
+          <a:p>
+            <a:pPr marL="0" indent="0" algn="l">
+              <a:lnSpc>
+                <a:spcPts val="2280"/>
+              </a:lnSpc>
+              <a:buNone/>
+            </a:pPr>
+            <a:r>
+              <a:rPr lang="en-US" sz="1900" b="1" dirty="0">
+                <a:solidFill>
+                  <a:srgbClr val="12202F"/>
+                </a:solidFill>
+                <a:latin typeface="Poppins" pitchFamily="34" charset="0"/>
+                <a:ea typeface="Poppins" pitchFamily="34" charset="-122"/>
+                <a:cs typeface="Poppins" pitchFamily="34" charset="-120"/>
+              </a:rPr>
+              <a:t>Next</a:t>
+            </a:r>
+            <a:endParaRPr lang="en-US" sz="1900" dirty="0"/>
+          </a:p>
+        </p:txBody>
+      </p:sp>
+      <p:sp>
+        <p:nvSpPr>
+          <p:cNvPr id="10" name="Text 8"/>
+          <p:cNvSpPr/>
+          <p:nvPr/>
+        </p:nvSpPr>
+        <p:spPr>
+          <a:xfrm>
+            <a:off x="6471158" y="2161449"/>
+            <a:ext cx="4787773" cy="1163108"/>
+          </a:xfrm>
+          <a:prstGeom prst="rect">
+            <a:avLst/>
+          </a:prstGeom>
+          <a:noFill/>
+          <a:ln/>
+        </p:spPr>
+        <p:txBody>
+          <a:bodyPr wrap="square" lIns="0" tIns="0" rIns="0" bIns="0" rtlCol="0" anchor="t">
+            <a:normAutofit/>
+          </a:bodyPr>
+          <a:lstStyle/>
+          <a:p>
+            <a:pPr marL="196342" indent="-196342" algn="l">
+              <a:lnSpc>
+                <a:spcPts val="2240"/>
+              </a:lnSpc>
+              <a:buSzPct val="100000"/>
+              <a:buChar char="•"/>
+            </a:pPr>
+            <a:r>
+              <a:rPr lang="en-US" sz="1600" dirty="0">
+                <a:solidFill>
+                  <a:srgbClr val="3A4856"/>
+                </a:solidFill>
+                <a:latin typeface="Poppins" pitchFamily="34" charset="0"/>
+                <a:ea typeface="Poppins" pitchFamily="34" charset="-122"/>
+                <a:cs typeface="Poppins" pitchFamily="34" charset="-120"/>
+              </a:rPr>
+              <a:t>Authentication and per-user access</a:t>
+            </a:r>
+            <a:endParaRPr lang="en-US" sz="1600" dirty="0"/>
+          </a:p>
+          <a:p>
+            <a:pPr marL="196342" indent="-196342" algn="l">
+              <a:lnSpc>
+                <a:spcPts val="2240"/>
+              </a:lnSpc>
+              <a:buSzPct val="100000"/>
+              <a:buChar char="•"/>
+            </a:pPr>
+            <a:r>
+              <a:rPr lang="en-US" sz="1600" dirty="0">
+                <a:solidFill>
+                  <a:srgbClr val="3A4856"/>
+                </a:solidFill>
+                <a:latin typeface="Poppins" pitchFamily="34" charset="0"/>
+                <a:ea typeface="Poppins" pitchFamily="34" charset="-122"/>
+                <a:cs typeface="Poppins" pitchFamily="34" charset="-120"/>
+              </a:rPr>
+              <a:t>Automated API and security tests</a:t>
+            </a:r>
+            <a:endParaRPr lang="en-US" sz="1600" dirty="0"/>
+          </a:p>
+          <a:p>
+            <a:pPr marL="196342" indent="-196342" algn="l">
+              <a:lnSpc>
+                <a:spcPts val="2240"/>
+              </a:lnSpc>
+              <a:buSzPct val="100000"/>
+              <a:buChar char="•"/>
+            </a:pPr>
+            <a:r>
+              <a:rPr lang="en-US" sz="1600" dirty="0">
+                <a:solidFill>
+                  <a:srgbClr val="3A4856"/>
+                </a:solidFill>
+                <a:latin typeface="Poppins" pitchFamily="34" charset="0"/>
+                <a:ea typeface="Poppins" pitchFamily="34" charset="-122"/>
+                <a:cs typeface="Poppins" pitchFamily="34" charset="-120"/>
+              </a:rPr>
+              <a:t>Budget recommendations</a:t>
+            </a:r>
+            <a:endParaRPr lang="en-US" sz="1600" dirty="0"/>
+          </a:p>
+          <a:p>
+            <a:pPr marL="196342" indent="-196342" algn="l">
+              <a:lnSpc>
+                <a:spcPts val="2240"/>
+              </a:lnSpc>
+              <a:buSzPct val="100000"/>
+              <a:buChar char="•"/>
+            </a:pPr>
+            <a:r>
+              <a:rPr lang="en-US" sz="1600" dirty="0">
+                <a:solidFill>
+                  <a:srgbClr val="3A4856"/>
+                </a:solidFill>
+                <a:latin typeface="Poppins" pitchFamily="34" charset="0"/>
+                <a:ea typeface="Poppins" pitchFamily="34" charset="-122"/>
+                <a:cs typeface="Poppins" pitchFamily="34" charset="-120"/>
+              </a:rPr>
+              <a:t>Mobile app and optional cloud sync</a:t>
+            </a:r>
+            <a:endParaRPr lang="en-US" sz="1600" dirty="0"/>
+          </a:p>
+        </p:txBody>
+      </p:sp>
+      <p:sp>
+        <p:nvSpPr>
+          <p:cNvPr id="11" name="Text 9"/>
+          <p:cNvSpPr/>
+          <p:nvPr/>
+        </p:nvSpPr>
+        <p:spPr>
+          <a:xfrm>
+            <a:off x="812800" y="6238280"/>
+            <a:ext cx="1176496" cy="238720"/>
+          </a:xfrm>
+          <a:prstGeom prst="rect">
+            <a:avLst/>
+          </a:prstGeom>
+          <a:noFill/>
+          <a:ln/>
+        </p:spPr>
+        <p:txBody>
+          <a:bodyPr wrap="square" lIns="0" tIns="0" rIns="0" bIns="0" rtlCol="0" anchor="t">
+            <a:normAutofit/>
+          </a:bodyPr>
+          <a:lstStyle/>
+          <a:p>
+            <a:pPr marL="0" indent="0" algn="l">
+              <a:lnSpc>
+                <a:spcPts val="1680"/>
+              </a:lnSpc>
+              <a:buNone/>
+            </a:pPr>
+            <a:r>
+              <a:rPr lang="en-US" sz="1200" dirty="0">
+                <a:solidFill>
+                  <a:srgbClr val="5B6773"/>
+                </a:solidFill>
+                <a:latin typeface="Poppins" pitchFamily="34" charset="0"/>
+                <a:ea typeface="Poppins" pitchFamily="34" charset="-122"/>
+                <a:cs typeface="Poppins" pitchFamily="34" charset="-120"/>
+              </a:rPr>
+              <a:t>HisabBot · 09</a:t>
+            </a:r>
+            <a:endParaRPr lang="en-US" sz="1200" dirty="0"/>
+          </a:p>
+        </p:txBody>
+      </p:sp>
+    </p:spTree>
+  </p:cSld>
+  <p:clrMapOvr>
+    <a:masterClrMapping/>
+  </p:clrMapOvr>
 </p:sld>
 </file>
 
